--- a/slides/session2/03-k-induction.pptx
+++ b/slides/session2/03-k-induction.pptx
@@ -18,6 +18,11 @@
     <p:sldId id="517" r:id="rId6"/>
     <p:sldId id="519" r:id="rId7"/>
     <p:sldId id="524" r:id="rId8"/>
+    <p:sldId id="525" r:id="rId15"/>
+    <p:sldId id="526" r:id="rId16"/>
+    <p:sldId id="527" r:id="rId17"/>
+    <p:sldId id="528" r:id="rId18"/>
+    <p:sldId id="529" r:id="rId19"/>
   </p:sldIdLst>
   <p:sldSz cx="12192000" cy="6858000" type="screen4x3"/>
   <p:notesSz cx="6946900" cy="9232900"/>
@@ -11721,6 +11726,186 @@
 </p:sld>
 </file>
 
+<file path=ppt/slides/slide10.xml><?xml version="1.0" encoding="utf-8"?>
+<p:sld xmlns:a="http://schemas.openxmlformats.org/drawingml/2006/main" xmlns:p="http://schemas.openxmlformats.org/presentationml/2006/main" xmlns:r="http://schemas.openxmlformats.org/officeDocument/2006/relationships">
+  <p:cSld>
+    <p:spTree>
+      <p:nvGrpSpPr>
+        <p:cNvPr id="1" name=""/>
+        <p:cNvGrpSpPr/>
+        <p:nvPr/>
+      </p:nvGrpSpPr>
+      <p:grpSpPr/>
+      <p:sp>
+        <p:nvSpPr>
+          <p:cNvPr id="2" name="TextBox 1"/>
+          <p:cNvSpPr txBox="1"/>
+          <p:nvPr/>
+        </p:nvSpPr>
+        <p:spPr>
+          <a:xfrm>
+            <a:off x="548640" y="365760"/>
+            <a:ext cx="11064240" cy="1005840"/>
+          </a:xfrm>
+          <a:prstGeom prst="rect">
+            <a:avLst/>
+          </a:prstGeom>
+          <a:noFill/>
+        </p:spPr>
+        <p:txBody>
+          <a:bodyPr wrap="square">
+            <a:spAutoFit/>
+          </a:bodyPr>
+          <a:lstStyle/>
+          <a:p>
+            <a:r>
+              <a:rPr sz="3600" b="1">
+                <a:solidFill>
+                  <a:srgbClr val="5A0A7A"/>
+                </a:solidFill>
+              </a:rPr>
+              <a:t>The missing invariant</a:t>
+            </a:r>
+          </a:p>
+        </p:txBody>
+      </p:sp>
+      <p:sp>
+        <p:nvSpPr>
+          <p:cNvPr id="3" name="TextBox 2"/>
+          <p:cNvSpPr txBox="1"/>
+          <p:nvPr/>
+        </p:nvSpPr>
+        <p:spPr>
+          <a:xfrm>
+            <a:off x="731520" y="1463040"/>
+            <a:ext cx="10789920" cy="5120640"/>
+          </a:xfrm>
+          <a:prstGeom prst="rect">
+            <a:avLst/>
+          </a:prstGeom>
+          <a:noFill/>
+        </p:spPr>
+        <p:txBody>
+          <a:bodyPr wrap="square">
+            <a:spAutoFit/>
+          </a:bodyPr>
+          <a:lstStyle/>
+          <a:p>
+            <a:pPr>
+              <a:spcAft>
+                <a:spcPts val="0"/>
+              </a:spcAft>
+            </a:pPr>
+            <a:r>
+              <a:rPr sz="1800">
+                <a:solidFill>
+                  <a:srgbClr val="212121"/>
+                </a:solidFill>
+                <a:latin typeface="Courier New"/>
+              </a:rPr>
+              <a:t>sum == 2 * i      /* holds at every loop head */</a:t>
+            </a:r>
+          </a:p>
+          <a:p>
+            <a:pPr>
+              <a:spcAft>
+                <a:spcPts val="800"/>
+              </a:spcAft>
+            </a:pPr>
+            <a:r>
+              <a:rPr sz="2200">
+                <a:solidFill>
+                  <a:srgbClr val="212121"/>
+                </a:solidFill>
+              </a:rPr>
+              <a:t/>
+            </a:r>
+          </a:p>
+          <a:p>
+            <a:pPr>
+              <a:spcAft>
+                <a:spcPts val="800"/>
+              </a:spcAft>
+            </a:pPr>
+            <a:r>
+              <a:rPr sz="2200">
+                <a:solidFill>
+                  <a:srgbClr val="212121"/>
+                </a:solidFill>
+              </a:rPr>
+              <a:t>Add it and the inductive step closes: a havocked state must now satisfy the invariant, and the exit assertion follows (i == n there).</a:t>
+            </a:r>
+          </a:p>
+          <a:p>
+            <a:pPr>
+              <a:spcAft>
+                <a:spcPts val="800"/>
+              </a:spcAft>
+            </a:pPr>
+            <a:r>
+              <a:rPr sz="2200">
+                <a:solidFill>
+                  <a:srgbClr val="212121"/>
+                </a:solidFill>
+              </a:rPr>
+              <a:t/>
+            </a:r>
+          </a:p>
+          <a:p>
+            <a:pPr>
+              <a:spcAft>
+                <a:spcPts val="800"/>
+              </a:spcAft>
+            </a:pPr>
+            <a:r>
+              <a:rPr sz="2200">
+                <a:solidFill>
+                  <a:srgbClr val="212121"/>
+                </a:solidFill>
+              </a:rPr>
+              <a:t>Stating loop invariants is exactly what deductive verifiers ask of you:</a:t>
+            </a:r>
+          </a:p>
+          <a:p>
+            <a:pPr lvl="1">
+              <a:spcAft>
+                <a:spcPts val="800"/>
+              </a:spcAft>
+            </a:pPr>
+            <a:r>
+              <a:rPr sz="2000">
+                <a:solidFill>
+                  <a:srgbClr val="212121"/>
+                </a:solidFill>
+              </a:rPr>
+              <a:t>Dafny, Frama-C/ACSL — invariant annotations checked by a solver.</a:t>
+            </a:r>
+          </a:p>
+          <a:p>
+            <a:pPr lvl="1">
+              <a:spcAft>
+                <a:spcPts val="800"/>
+              </a:spcAft>
+            </a:pPr>
+            <a:r>
+              <a:rPr sz="2000">
+                <a:solidFill>
+                  <a:srgbClr val="212121"/>
+                </a:solidFill>
+              </a:rPr>
+              <a:t>BMC needed no annotations but gave a bounded answer; invariants buy the unbounded one.</a:t>
+            </a:r>
+          </a:p>
+        </p:txBody>
+      </p:sp>
+    </p:spTree>
+  </p:cSld>
+  <p:clrMapOvr>
+    <a:masterClrMapping/>
+  </p:clrMapOvr>
+</p:sld>
+</file>
+
 <file path=ppt/slides/slide2.xml><?xml version="1.0" encoding="utf-8"?>
 <p:sld xmlns:a="http://schemas.openxmlformats.org/drawingml/2006/main" xmlns:r="http://schemas.openxmlformats.org/officeDocument/2006/relationships" xmlns:p="http://schemas.openxmlformats.org/presentationml/2006/main">
   <p:cSld>
@@ -15747,6 +15932,805 @@
               <a:latin typeface="Arial" pitchFamily="34" charset="0"/>
               <a:cs typeface="Arial" pitchFamily="34" charset="0"/>
             </a:endParaRPr>
+          </a:p>
+        </p:txBody>
+      </p:sp>
+    </p:spTree>
+  </p:cSld>
+  <p:clrMapOvr>
+    <a:masterClrMapping/>
+  </p:clrMapOvr>
+</p:sld>
+</file>
+
+<file path=ppt/slides/slide6.xml><?xml version="1.0" encoding="utf-8"?>
+<p:sld xmlns:a="http://schemas.openxmlformats.org/drawingml/2006/main" xmlns:p="http://schemas.openxmlformats.org/presentationml/2006/main" xmlns:r="http://schemas.openxmlformats.org/officeDocument/2006/relationships">
+  <p:cSld>
+    <p:spTree>
+      <p:nvGrpSpPr>
+        <p:cNvPr id="1" name=""/>
+        <p:cNvGrpSpPr/>
+        <p:nvPr/>
+      </p:nvGrpSpPr>
+      <p:grpSpPr/>
+      <p:sp>
+        <p:nvSpPr>
+          <p:cNvPr id="2" name="TextBox 1"/>
+          <p:cNvSpPr txBox="1"/>
+          <p:nvPr/>
+        </p:nvSpPr>
+        <p:spPr>
+          <a:xfrm>
+            <a:off x="548640" y="365760"/>
+            <a:ext cx="11064240" cy="1005840"/>
+          </a:xfrm>
+          <a:prstGeom prst="rect">
+            <a:avLst/>
+          </a:prstGeom>
+          <a:noFill/>
+        </p:spPr>
+        <p:txBody>
+          <a:bodyPr wrap="square">
+            <a:spAutoFit/>
+          </a:bodyPr>
+          <a:lstStyle/>
+          <a:p>
+            <a:r>
+              <a:rPr sz="3600" b="1">
+                <a:solidFill>
+                  <a:srgbClr val="5A0A7A"/>
+                </a:solidFill>
+              </a:rPr>
+              <a:t>What --unwind k actually claims</a:t>
+            </a:r>
+          </a:p>
+        </p:txBody>
+      </p:sp>
+      <p:sp>
+        <p:nvSpPr>
+          <p:cNvPr id="3" name="TextBox 2"/>
+          <p:cNvSpPr txBox="1"/>
+          <p:nvPr/>
+        </p:nvSpPr>
+        <p:spPr>
+          <a:xfrm>
+            <a:off x="731520" y="1463040"/>
+            <a:ext cx="10789920" cy="5120640"/>
+          </a:xfrm>
+          <a:prstGeom prst="rect">
+            <a:avLst/>
+          </a:prstGeom>
+          <a:noFill/>
+        </p:spPr>
+        <p:txBody>
+          <a:bodyPr wrap="square">
+            <a:spAutoFit/>
+          </a:bodyPr>
+          <a:lstStyle/>
+          <a:p>
+            <a:pPr>
+              <a:spcAft>
+                <a:spcPts val="800"/>
+              </a:spcAft>
+            </a:pPr>
+            <a:r>
+              <a:rPr sz="2200">
+                <a:solidFill>
+                  <a:srgbClr val="212121"/>
+                </a:solidFill>
+              </a:rPr>
+              <a:t>SUCCESSFUL at bound k = no violation in any execution that fits within k loop unwindings.</a:t>
+            </a:r>
+          </a:p>
+          <a:p>
+            <a:pPr>
+              <a:spcAft>
+                <a:spcPts val="800"/>
+              </a:spcAft>
+            </a:pPr>
+            <a:r>
+              <a:rPr sz="2200">
+                <a:solidFill>
+                  <a:srgbClr val="212121"/>
+                </a:solidFill>
+              </a:rPr>
+              <a:t/>
+            </a:r>
+          </a:p>
+          <a:p>
+            <a:pPr>
+              <a:spcAft>
+                <a:spcPts val="800"/>
+              </a:spcAft>
+            </a:pPr>
+            <a:r>
+              <a:rPr sz="2200">
+                <a:solidFill>
+                  <a:srgbClr val="212121"/>
+                </a:solidFill>
+              </a:rPr>
+              <a:t>The unwinding assertion is the honesty check:</a:t>
+            </a:r>
+          </a:p>
+          <a:p>
+            <a:pPr lvl="1">
+              <a:spcAft>
+                <a:spcPts val="800"/>
+              </a:spcAft>
+            </a:pPr>
+            <a:r>
+              <a:rPr sz="2000">
+                <a:solidFill>
+                  <a:srgbClr val="212121"/>
+                </a:solidFill>
+              </a:rPr>
+              <a:t>if it FAILS, the bound truncated the loop — a bound problem, not a program bug.</a:t>
+            </a:r>
+          </a:p>
+          <a:p>
+            <a:pPr lvl="1">
+              <a:spcAft>
+                <a:spcPts val="800"/>
+              </a:spcAft>
+            </a:pPr>
+            <a:r>
+              <a:rPr sz="2000">
+                <a:solidFill>
+                  <a:srgbClr val="212121"/>
+                </a:solidFill>
+              </a:rPr>
+              <a:t>if it holds, every execution was fully explored: the bounded verdict is a complete one.</a:t>
+            </a:r>
+          </a:p>
+        </p:txBody>
+      </p:sp>
+    </p:spTree>
+  </p:cSld>
+  <p:clrMapOvr>
+    <a:masterClrMapping/>
+  </p:clrMapOvr>
+</p:sld>
+</file>
+
+<file path=ppt/slides/slide7.xml><?xml version="1.0" encoding="utf-8"?>
+<p:sld xmlns:a="http://schemas.openxmlformats.org/drawingml/2006/main" xmlns:p="http://schemas.openxmlformats.org/presentationml/2006/main" xmlns:r="http://schemas.openxmlformats.org/officeDocument/2006/relationships">
+  <p:cSld>
+    <p:spTree>
+      <p:nvGrpSpPr>
+        <p:cNvPr id="1" name=""/>
+        <p:cNvGrpSpPr/>
+        <p:nvPr/>
+      </p:nvGrpSpPr>
+      <p:grpSpPr/>
+      <p:sp>
+        <p:nvSpPr>
+          <p:cNvPr id="2" name="TextBox 1"/>
+          <p:cNvSpPr txBox="1"/>
+          <p:nvPr/>
+        </p:nvSpPr>
+        <p:spPr>
+          <a:xfrm>
+            <a:off x="548640" y="365760"/>
+            <a:ext cx="11064240" cy="1005840"/>
+          </a:xfrm>
+          <a:prstGeom prst="rect">
+            <a:avLst/>
+          </a:prstGeom>
+          <a:noFill/>
+        </p:spPr>
+        <p:txBody>
+          <a:bodyPr wrap="square">
+            <a:spAutoFit/>
+          </a:bodyPr>
+          <a:lstStyle/>
+          <a:p>
+            <a:r>
+              <a:rPr sz="3600" b="1">
+                <a:solidFill>
+                  <a:srgbClr val="5A0A7A"/>
+                </a:solidFill>
+              </a:rPr>
+              <a:t>unwind.c — the experiment</a:t>
+            </a:r>
+          </a:p>
+        </p:txBody>
+      </p:sp>
+      <p:graphicFrame>
+        <p:nvGraphicFramePr>
+          <p:cNvPr id="3" name="Table 2"/>
+          <p:cNvGraphicFramePr>
+            <a:graphicFrameLocks noGrp="1"/>
+          </p:cNvGraphicFramePr>
+          <p:nvPr/>
+        </p:nvGraphicFramePr>
+        <p:xfrm>
+          <a:off x="731520" y="1554480"/>
+          <a:ext cx="10698480" cy="1828800"/>
+        </p:xfrm>
+        <a:graphic>
+          <a:graphicData uri="http://schemas.openxmlformats.org/drawingml/2006/table">
+            <a:tbl>
+              <a:tblPr firstRow="1" bandRow="1">
+                <a:tableStyleId>{5C22544A-7EE6-4342-B048-85BDC9FD1C3A}</a:tableStyleId>
+              </a:tblPr>
+              <a:tblGrid>
+                <a:gridCol w="2194560"/>
+                <a:gridCol w="3566160"/>
+                <a:gridCol w="4937760"/>
+              </a:tblGrid>
+              <a:tr h="365760">
+                <a:tc>
+                  <a:txBody>
+                    <a:bodyPr/>
+                    <a:lstStyle/>
+                    <a:p>
+                      <a:r>
+                        <a:rPr sz="1600" b="1"/>
+                        <a:t>Run</a:t>
+                      </a:r>
+                    </a:p>
+                  </a:txBody>
+                  <a:tcPr/>
+                </a:tc>
+                <a:tc>
+                  <a:txBody>
+                    <a:bodyPr/>
+                    <a:lstStyle/>
+                    <a:p>
+                      <a:r>
+                        <a:rPr sz="1600" b="1"/>
+                        <a:t>Verdict</a:t>
+                      </a:r>
+                    </a:p>
+                  </a:txBody>
+                  <a:tcPr/>
+                </a:tc>
+                <a:tc>
+                  <a:txBody>
+                    <a:bodyPr/>
+                    <a:lstStyle/>
+                    <a:p>
+                      <a:r>
+                        <a:rPr sz="1600" b="1"/>
+                        <a:t>What it means</a:t>
+                      </a:r>
+                    </a:p>
+                  </a:txBody>
+                  <a:tcPr/>
+                </a:tc>
+              </a:tr>
+              <a:tr h="365760">
+                <a:tc>
+                  <a:txBody>
+                    <a:bodyPr/>
+                    <a:lstStyle/>
+                    <a:p>
+                      <a:r>
+                        <a:rPr sz="1600"/>
+                        <a:t>--unwind 5</a:t>
+                      </a:r>
+                    </a:p>
+                  </a:txBody>
+                  <a:tcPr/>
+                </a:tc>
+                <a:tc>
+                  <a:txBody>
+                    <a:bodyPr/>
+                    <a:lstStyle/>
+                    <a:p>
+                      <a:r>
+                        <a:rPr sz="1600"/>
+                        <a:t>FAILED (unwinding assertion)</a:t>
+                      </a:r>
+                    </a:p>
+                  </a:txBody>
+                  <a:tcPr/>
+                </a:tc>
+                <a:tc>
+                  <a:txBody>
+                    <a:bodyPr/>
+                    <a:lstStyle/>
+                    <a:p>
+                      <a:r>
+                        <a:rPr sz="1600"/>
+                        <a:t>Loop can run more than 5 times</a:t>
+                      </a:r>
+                    </a:p>
+                  </a:txBody>
+                  <a:tcPr/>
+                </a:tc>
+              </a:tr>
+              <a:tr h="365760">
+                <a:tc>
+                  <a:txBody>
+                    <a:bodyPr/>
+                    <a:lstStyle/>
+                    <a:p>
+                      <a:r>
+                        <a:rPr sz="1600"/>
+                        <a:t>--unwind 20</a:t>
+                      </a:r>
+                    </a:p>
+                  </a:txBody>
+                  <a:tcPr/>
+                </a:tc>
+                <a:tc>
+                  <a:txBody>
+                    <a:bodyPr/>
+                    <a:lstStyle/>
+                    <a:p>
+                      <a:r>
+                        <a:rPr sz="1600"/>
+                        <a:t>FAILED (unwinding assertion)</a:t>
+                      </a:r>
+                    </a:p>
+                  </a:txBody>
+                  <a:tcPr/>
+                </a:tc>
+                <a:tc>
+                  <a:txBody>
+                    <a:bodyPr/>
+                    <a:lstStyle/>
+                    <a:p>
+                      <a:r>
+                        <a:rPr sz="1600"/>
+                        <a:t>Still short</a:t>
+                      </a:r>
+                    </a:p>
+                  </a:txBody>
+                  <a:tcPr/>
+                </a:tc>
+              </a:tr>
+              <a:tr h="365760">
+                <a:tc>
+                  <a:txBody>
+                    <a:bodyPr/>
+                    <a:lstStyle/>
+                    <a:p>
+                      <a:r>
+                        <a:rPr sz="1600"/>
+                        <a:t>--unwind 60</a:t>
+                      </a:r>
+                    </a:p>
+                  </a:txBody>
+                  <a:tcPr/>
+                </a:tc>
+                <a:tc>
+                  <a:txBody>
+                    <a:bodyPr/>
+                    <a:lstStyle/>
+                    <a:p>
+                      <a:r>
+                        <a:rPr sz="1600"/>
+                        <a:t>SUCCESSFUL</a:t>
+                      </a:r>
+                    </a:p>
+                  </a:txBody>
+                  <a:tcPr/>
+                </a:tc>
+                <a:tc>
+                  <a:txBody>
+                    <a:bodyPr/>
+                    <a:lstStyle/>
+                    <a:p>
+                      <a:r>
+                        <a:rPr sz="1600"/>
+                        <a:t>Complete proof — every n &lt;= MAX=50 fits</a:t>
+                      </a:r>
+                    </a:p>
+                  </a:txBody>
+                  <a:tcPr/>
+                </a:tc>
+              </a:tr>
+              <a:tr h="365760">
+                <a:tc>
+                  <a:txBody>
+                    <a:bodyPr/>
+                    <a:lstStyle/>
+                    <a:p>
+                      <a:r>
+                        <a:rPr sz="1600"/>
+                        <a:t>--k-induction</a:t>
+                      </a:r>
+                    </a:p>
+                  </a:txBody>
+                  <a:tcPr/>
+                </a:tc>
+                <a:tc>
+                  <a:txBody>
+                    <a:bodyPr/>
+                    <a:lstStyle/>
+                    <a:p>
+                      <a:r>
+                        <a:rPr sz="1600"/>
+                        <a:t>UNKNOWN</a:t>
+                      </a:r>
+                    </a:p>
+                  </a:txBody>
+                  <a:tcPr/>
+                </a:tc>
+                <a:tc>
+                  <a:txBody>
+                    <a:bodyPr/>
+                    <a:lstStyle/>
+                    <a:p>
+                      <a:r>
+                        <a:rPr sz="1600"/>
+                        <a:t>See the next two slides</a:t>
+                      </a:r>
+                    </a:p>
+                  </a:txBody>
+                  <a:tcPr/>
+                </a:tc>
+              </a:tr>
+            </a:tbl>
+          </a:graphicData>
+        </a:graphic>
+      </p:graphicFrame>
+      <p:sp>
+        <p:nvSpPr>
+          <p:cNvPr id="4" name="TextBox 3"/>
+          <p:cNvSpPr txBox="1"/>
+          <p:nvPr/>
+        </p:nvSpPr>
+        <p:spPr>
+          <a:xfrm>
+            <a:off x="731520" y="4206240"/>
+            <a:ext cx="10789920" cy="2377440"/>
+          </a:xfrm>
+          <a:prstGeom prst="rect">
+            <a:avLst/>
+          </a:prstGeom>
+          <a:noFill/>
+        </p:spPr>
+        <p:txBody>
+          <a:bodyPr wrap="square">
+            <a:spAutoFit/>
+          </a:bodyPr>
+          <a:lstStyle/>
+          <a:p>
+            <a:pPr>
+              <a:spcAft>
+                <a:spcPts val="800"/>
+              </a:spcAft>
+            </a:pPr>
+            <a:r>
+              <a:rPr sz="2000">
+                <a:solidFill>
+                  <a:srgbClr val="212121"/>
+                </a:solidFill>
+              </a:rPr>
+              <a:t>60 &gt; MAX means no execution is truncated: the bounded check quantifies over ALL inputs.</a:t>
+            </a:r>
+          </a:p>
+        </p:txBody>
+      </p:sp>
+    </p:spTree>
+  </p:cSld>
+  <p:clrMapOvr>
+    <a:masterClrMapping/>
+  </p:clrMapOvr>
+</p:sld>
+</file>
+
+<file path=ppt/slides/slide8.xml><?xml version="1.0" encoding="utf-8"?>
+<p:sld xmlns:a="http://schemas.openxmlformats.org/drawingml/2006/main" xmlns:p="http://schemas.openxmlformats.org/presentationml/2006/main" xmlns:r="http://schemas.openxmlformats.org/officeDocument/2006/relationships">
+  <p:cSld>
+    <p:spTree>
+      <p:nvGrpSpPr>
+        <p:cNvPr id="1" name=""/>
+        <p:cNvGrpSpPr/>
+        <p:nvPr/>
+      </p:nvGrpSpPr>
+      <p:grpSpPr/>
+      <p:sp>
+        <p:nvSpPr>
+          <p:cNvPr id="2" name="TextBox 1"/>
+          <p:cNvSpPr txBox="1"/>
+          <p:nvPr/>
+        </p:nvSpPr>
+        <p:spPr>
+          <a:xfrm>
+            <a:off x="548640" y="365760"/>
+            <a:ext cx="11064240" cy="1005840"/>
+          </a:xfrm>
+          <a:prstGeom prst="rect">
+            <a:avLst/>
+          </a:prstGeom>
+          <a:noFill/>
+        </p:spPr>
+        <p:txBody>
+          <a:bodyPr wrap="square">
+            <a:spAutoFit/>
+          </a:bodyPr>
+          <a:lstStyle/>
+          <a:p>
+            <a:r>
+              <a:rPr sz="3600" b="1">
+                <a:solidFill>
+                  <a:srgbClr val="5A0A7A"/>
+                </a:solidFill>
+              </a:rPr>
+              <a:t>k-induction: the three checks</a:t>
+            </a:r>
+          </a:p>
+        </p:txBody>
+      </p:sp>
+      <p:sp>
+        <p:nvSpPr>
+          <p:cNvPr id="3" name="TextBox 2"/>
+          <p:cNvSpPr txBox="1"/>
+          <p:nvPr/>
+        </p:nvSpPr>
+        <p:spPr>
+          <a:xfrm>
+            <a:off x="731520" y="1463040"/>
+            <a:ext cx="10789920" cy="5120640"/>
+          </a:xfrm>
+          <a:prstGeom prst="rect">
+            <a:avLst/>
+          </a:prstGeom>
+          <a:noFill/>
+        </p:spPr>
+        <p:txBody>
+          <a:bodyPr wrap="square">
+            <a:spAutoFit/>
+          </a:bodyPr>
+          <a:lstStyle/>
+          <a:p>
+            <a:pPr>
+              <a:spcAft>
+                <a:spcPts val="800"/>
+              </a:spcAft>
+            </a:pPr>
+            <a:r>
+              <a:rPr sz="2200">
+                <a:solidFill>
+                  <a:srgbClr val="212121"/>
+                </a:solidFill>
+              </a:rPr>
+              <a:t>Prove a loop safe for ANY bound with three bounded queries:</a:t>
+            </a:r>
+          </a:p>
+          <a:p>
+            <a:pPr lvl="1">
+              <a:spcAft>
+                <a:spcPts val="800"/>
+              </a:spcAft>
+            </a:pPr>
+            <a:r>
+              <a:rPr sz="2000">
+                <a:solidFill>
+                  <a:srgbClr val="212121"/>
+                </a:solidFill>
+              </a:rPr>
+              <a:t>Base case — no violation in the first k iterations.</a:t>
+            </a:r>
+          </a:p>
+          <a:p>
+            <a:pPr lvl="1">
+              <a:spcAft>
+                <a:spcPts val="800"/>
+              </a:spcAft>
+            </a:pPr>
+            <a:r>
+              <a:rPr sz="2000">
+                <a:solidFill>
+                  <a:srgbClr val="212121"/>
+                </a:solidFill>
+              </a:rPr>
+              <a:t>Forward condition — k iterations reach every reachable state (then the base case alone is a proof).</a:t>
+            </a:r>
+          </a:p>
+          <a:p>
+            <a:pPr lvl="1">
+              <a:spcAft>
+                <a:spcPts val="800"/>
+              </a:spcAft>
+            </a:pPr>
+            <a:r>
+              <a:rPr sz="2000">
+                <a:solidFill>
+                  <a:srgbClr val="212121"/>
+                </a:solidFill>
+              </a:rPr>
+              <a:t>Inductive step — from ANY k safe consecutive iterations, iteration k+1 is also safe.</a:t>
+            </a:r>
+          </a:p>
+          <a:p>
+            <a:pPr>
+              <a:spcAft>
+                <a:spcPts val="800"/>
+              </a:spcAft>
+            </a:pPr>
+            <a:r>
+              <a:rPr sz="2200">
+                <a:solidFill>
+                  <a:srgbClr val="212121"/>
+                </a:solidFill>
+              </a:rPr>
+              <a:t/>
+            </a:r>
+          </a:p>
+          <a:p>
+            <a:pPr>
+              <a:spcAft>
+                <a:spcPts val="800"/>
+              </a:spcAft>
+            </a:pPr>
+            <a:r>
+              <a:rPr sz="2200">
+                <a:solidFill>
+                  <a:srgbClr val="212121"/>
+                </a:solidFill>
+              </a:rPr>
+              <a:t>Each check is a bounded (finite) formula — same machinery as BMC, different question.</a:t>
+            </a:r>
+          </a:p>
+        </p:txBody>
+      </p:sp>
+    </p:spTree>
+  </p:cSld>
+  <p:clrMapOvr>
+    <a:masterClrMapping/>
+  </p:clrMapOvr>
+</p:sld>
+</file>
+
+<file path=ppt/slides/slide9.xml><?xml version="1.0" encoding="utf-8"?>
+<p:sld xmlns:a="http://schemas.openxmlformats.org/drawingml/2006/main" xmlns:p="http://schemas.openxmlformats.org/presentationml/2006/main" xmlns:r="http://schemas.openxmlformats.org/officeDocument/2006/relationships">
+  <p:cSld>
+    <p:spTree>
+      <p:nvGrpSpPr>
+        <p:cNvPr id="1" name=""/>
+        <p:cNvGrpSpPr/>
+        <p:nvPr/>
+      </p:nvGrpSpPr>
+      <p:grpSpPr/>
+      <p:sp>
+        <p:nvSpPr>
+          <p:cNvPr id="2" name="TextBox 1"/>
+          <p:cNvSpPr txBox="1"/>
+          <p:nvPr/>
+        </p:nvSpPr>
+        <p:spPr>
+          <a:xfrm>
+            <a:off x="548640" y="365760"/>
+            <a:ext cx="11064240" cy="1005840"/>
+          </a:xfrm>
+          <a:prstGeom prst="rect">
+            <a:avLst/>
+          </a:prstGeom>
+          <a:noFill/>
+        </p:spPr>
+        <p:txBody>
+          <a:bodyPr wrap="square">
+            <a:spAutoFit/>
+          </a:bodyPr>
+          <a:lstStyle/>
+          <a:p>
+            <a:r>
+              <a:rPr sz="3600" b="1">
+                <a:solidFill>
+                  <a:srgbClr val="5A0A7A"/>
+                </a:solidFill>
+              </a:rPr>
+              <a:t>Why UNKNOWN on unwind.c</a:t>
+            </a:r>
+          </a:p>
+        </p:txBody>
+      </p:sp>
+      <p:sp>
+        <p:nvSpPr>
+          <p:cNvPr id="3" name="TextBox 2"/>
+          <p:cNvSpPr txBox="1"/>
+          <p:nvPr/>
+        </p:nvSpPr>
+        <p:spPr>
+          <a:xfrm>
+            <a:off x="731520" y="1463040"/>
+            <a:ext cx="10789920" cy="5120640"/>
+          </a:xfrm>
+          <a:prstGeom prst="rect">
+            <a:avLst/>
+          </a:prstGeom>
+          <a:noFill/>
+        </p:spPr>
+        <p:txBody>
+          <a:bodyPr wrap="square">
+            <a:spAutoFit/>
+          </a:bodyPr>
+          <a:lstStyle/>
+          <a:p>
+            <a:pPr>
+              <a:spcAft>
+                <a:spcPts val="800"/>
+              </a:spcAft>
+            </a:pPr>
+            <a:r>
+              <a:rPr sz="2200">
+                <a:solidFill>
+                  <a:srgbClr val="212121"/>
+                </a:solidFill>
+              </a:rPr>
+              <a:t>The inductive step starts from a havocked state: i and sum are ARBITRARY values, not values the program can reach.</a:t>
+            </a:r>
+          </a:p>
+          <a:p>
+            <a:pPr lvl="1">
+              <a:spcAft>
+                <a:spcPts val="800"/>
+              </a:spcAft>
+            </a:pPr>
+            <a:r>
+              <a:rPr sz="2000">
+                <a:solidFill>
+                  <a:srgbClr val="212121"/>
+                </a:solidFill>
+              </a:rPr>
+              <a:t>From a mid-loop state where sum != 2*i, the step cannot conclude sum == 2*n at exit.</a:t>
+            </a:r>
+          </a:p>
+          <a:p>
+            <a:pPr lvl="1">
+              <a:spcAft>
+                <a:spcPts val="800"/>
+              </a:spcAft>
+            </a:pPr>
+            <a:r>
+              <a:rPr sz="2000">
+                <a:solidFill>
+                  <a:srgbClr val="212121"/>
+                </a:solidFill>
+              </a:rPr>
+              <a:t>So the step fails — for every k. ESBMC answers:</a:t>
+            </a:r>
+          </a:p>
+          <a:p>
+            <a:pPr lvl="1">
+              <a:spcAft>
+                <a:spcPts val="0"/>
+              </a:spcAft>
+            </a:pPr>
+            <a:r>
+              <a:rPr sz="1800">
+                <a:solidFill>
+                  <a:srgbClr val="212121"/>
+                </a:solidFill>
+                <a:latin typeface="Courier New"/>
+              </a:rPr>
+              <a:t>VERIFICATION UNKNOWN</a:t>
+            </a:r>
+          </a:p>
+          <a:p>
+            <a:pPr>
+              <a:spcAft>
+                <a:spcPts val="800"/>
+              </a:spcAft>
+            </a:pPr>
+            <a:r>
+              <a:rPr sz="2200">
+                <a:solidFill>
+                  <a:srgbClr val="212121"/>
+                </a:solidFill>
+              </a:rPr>
+              <a:t/>
+            </a:r>
+          </a:p>
+          <a:p>
+            <a:pPr>
+              <a:spcAft>
+                <a:spcPts val="800"/>
+              </a:spcAft>
+            </a:pPr>
+            <a:r>
+              <a:rPr sz="2200">
+                <a:solidFill>
+                  <a:srgbClr val="212121"/>
+                </a:solidFill>
+              </a:rPr>
+              <a:t>The assertion alone is not k-inductive. Nothing is wrong with the program — the proof needs help.</a:t>
+            </a:r>
           </a:p>
         </p:txBody>
       </p:sp>
